--- a/slides/11-01-why-security-matters.pptx
+++ b/slides/11-01-why-security-matters.pptx
@@ -4137,7 +4137,7 @@
         <p:spPr>
           <a:xfrm>
             <a:off x="457200" y="1508760"/>
-            <a:ext cx="8229600" cy="320040"/>
+            <a:ext cx="4937760" cy="320040"/>
           </a:xfrm>
           <a:prstGeom prst="rect">
             <a:avLst/>
@@ -4176,7 +4176,7 @@
         <p:spPr>
           <a:xfrm>
             <a:off x="457200" y="1874520"/>
-            <a:ext cx="8229600" cy="1188720"/>
+            <a:ext cx="4937760" cy="1188720"/>
           </a:xfrm>
           <a:prstGeom prst="rect">
             <a:avLst/>
@@ -4192,7 +4192,7 @@
               <a:buNone/>
             </a:pPr>
             <a:r>
-              <a:rPr lang="en-US" sz="3600" b="1" dirty="0">
+              <a:rPr lang="en-US" sz="3200" b="1" dirty="0">
                 <a:solidFill>
                   <a:srgbClr val="FFFFFF"/>
                 </a:solidFill>
@@ -4202,7 +4202,7 @@
               </a:rPr>
               <a:t>Why security matters to a business</a:t>
             </a:r>
-            <a:endParaRPr lang="en-US" sz="3600" dirty="0"/>
+            <a:endParaRPr lang="en-US" sz="3200" dirty="0"/>
           </a:p>
         </p:txBody>
       </p:sp>
@@ -4265,7 +4265,7 @@
         <p:spPr>
           <a:xfrm>
             <a:off x="457200" y="3383280"/>
-            <a:ext cx="8229600" cy="822960"/>
+            <a:ext cx="4937760" cy="822960"/>
           </a:xfrm>
           <a:prstGeom prst="rect">
             <a:avLst/>
@@ -4314,7 +4314,95 @@
       </p:sp>
       <p:sp>
         <p:nvSpPr>
-          <p:cNvPr id="9" name="Text 6"/>
+          <p:cNvPr id="9" name="Shape 6"/>
+          <p:cNvSpPr/>
+          <p:nvPr/>
+        </p:nvSpPr>
+        <p:spPr>
+          <a:xfrm>
+            <a:off x="5440680" y="502920"/>
+            <a:ext cx="3383280" cy="3931920"/>
+          </a:xfrm>
+          <a:prstGeom prst="ellipse">
+            <a:avLst/>
+          </a:prstGeom>
+          <a:solidFill>
+            <a:srgbClr val="3A3F33"/>
+          </a:solidFill>
+          <a:ln w="12700">
+            <a:solidFill>
+              <a:srgbClr val="3A3F33"/>
+            </a:solidFill>
+            <a:prstDash val="solid"/>
+          </a:ln>
+        </p:spPr>
+      </p:sp>
+      <p:pic>
+        <p:nvPicPr>
+          <p:cNvPr id="10" name="Image 1" descr="team">    </p:cNvPr>
+          <p:cNvPicPr>
+            <a:picLocks noChangeAspect="1"/>
+          </p:cNvPicPr>
+          <p:nvPr/>
+        </p:nvPicPr>
+        <p:blipFill>
+          <a:blip r:embed="rId2"/>
+          <a:stretch>
+            <a:fillRect/>
+          </a:stretch>
+        </p:blipFill>
+        <p:spPr>
+          <a:xfrm>
+            <a:off x="5394960" y="1461065"/>
+            <a:ext cx="3474720" cy="2015629"/>
+          </a:xfrm>
+          <a:prstGeom prst="rect">
+            <a:avLst/>
+          </a:prstGeom>
+        </p:spPr>
+      </p:pic>
+      <p:sp>
+        <p:nvSpPr>
+          <p:cNvPr id="11" name="Text 7"/>
+          <p:cNvSpPr txBox="1"/>
+          <p:nvPr/>
+        </p:nvSpPr>
+        <p:spPr>
+          <a:xfrm>
+            <a:off x="457200" y="4526280"/>
+            <a:ext cx="8229600" cy="201168"/>
+          </a:xfrm>
+          <a:prstGeom prst="rect">
+            <a:avLst/>
+          </a:prstGeom>
+          <a:noFill/>
+          <a:ln/>
+        </p:spPr>
+        <p:txBody>
+          <a:bodyPr wrap="square" lIns="0" tIns="0" rIns="0" bIns="0" rtlCol="0" anchor="ctr"/>
+          <a:lstStyle/>
+          <a:p>
+            <a:pPr indent="0" marL="0">
+              <a:buNone/>
+            </a:pPr>
+            <a:r>
+              <a:rPr lang="en-US" sz="750" dirty="0">
+                <a:solidFill>
+                  <a:srgbClr val="A39E98"/>
+                </a:solidFill>
+                <a:latin typeface="Open Sans" pitchFamily="34" charset="0"/>
+                <a:ea typeface="Open Sans" pitchFamily="34" charset="-122"/>
+                <a:cs typeface="Open Sans" pitchFamily="34" charset="-120"/>
+              </a:rPr>
+              <a:t>© 2026 Niranga Dharmaratna. Licensed CC BY-NC-SA 4.0. Icons: Font Awesome Free (CC BY 4.0). Illustrations: original, same licence.</a:t>
+            </a:r>
+            <a:endParaRPr lang="en-US" sz="750" dirty="0"/>
+          </a:p>
+        </p:txBody>
+      </p:sp>
+      <p:sp>
+        <p:nvSpPr>
+          <p:cNvPr id="12" name="Text 8"/>
           <p:cNvSpPr txBox="1"/>
           <p:nvPr/>
         </p:nvSpPr>
@@ -4353,7 +4441,7 @@
       </p:sp>
       <p:sp>
         <p:nvSpPr>
-          <p:cNvPr id="10" name="Text 7"/>
+          <p:cNvPr id="13" name="Text 9"/>
           <p:cNvSpPr txBox="1"/>
           <p:nvPr/>
         </p:nvSpPr>
@@ -4589,34 +4677,9 @@
           </a:p>
         </p:txBody>
       </p:sp>
-      <p:sp>
-        <p:nvSpPr>
-          <p:cNvPr id="8" name="Shape 5"/>
-          <p:cNvSpPr/>
-          <p:nvPr/>
-        </p:nvSpPr>
-        <p:spPr>
-          <a:xfrm>
-            <a:off x="731520" y="2103120"/>
-            <a:ext cx="1005840" cy="1005840"/>
-          </a:xfrm>
-          <a:prstGeom prst="ellipse">
-            <a:avLst/>
-          </a:prstGeom>
-          <a:solidFill>
-            <a:srgbClr val="C7A887"/>
-          </a:solidFill>
-          <a:ln w="12700">
-            <a:solidFill>
-              <a:srgbClr val="C7A887"/>
-            </a:solidFill>
-            <a:prstDash val="solid"/>
-          </a:ln>
-        </p:spPr>
-      </p:sp>
       <p:pic>
         <p:nvPicPr>
-          <p:cNvPr id="9" name="Image 0" descr="preencoded.png">    </p:cNvPr>
+          <p:cNvPr id="8" name="Image 0" descr="attacker">    </p:cNvPr>
           <p:cNvPicPr>
             <a:picLocks noChangeAspect="1"/>
           </p:cNvPicPr>
@@ -4630,8 +4693,8 @@
         </p:blipFill>
         <p:spPr>
           <a:xfrm>
-            <a:off x="982980" y="2354580"/>
-            <a:ext cx="502920" cy="502920"/>
+            <a:off x="274320" y="1889150"/>
+            <a:ext cx="1737360" cy="1250899"/>
           </a:xfrm>
           <a:prstGeom prst="rect">
             <a:avLst/>
@@ -4640,13 +4703,13 @@
       </p:pic>
       <p:sp>
         <p:nvSpPr>
-          <p:cNvPr id="10" name="Text 6"/>
-          <p:cNvSpPr txBox="1"/>
-          <p:nvPr/>
-        </p:nvSpPr>
-        <p:spPr>
-          <a:xfrm>
-            <a:off x="365760" y="3200400"/>
+          <p:cNvPr id="9" name="Text 5"/>
+          <p:cNvSpPr txBox="1"/>
+          <p:nvPr/>
+        </p:nvSpPr>
+        <p:spPr>
+          <a:xfrm>
+            <a:off x="274320" y="3337560"/>
             <a:ext cx="1737360" cy="365760"/>
           </a:xfrm>
           <a:prstGeom prst="rect">
@@ -4679,7 +4742,7 @@
       </p:sp>
       <p:sp>
         <p:nvSpPr>
-          <p:cNvPr id="11" name="Shape 7"/>
+          <p:cNvPr id="10" name="Shape 6"/>
           <p:cNvSpPr/>
           <p:nvPr/>
         </p:nvSpPr>
@@ -4703,7 +4766,7 @@
       </p:sp>
       <p:sp>
         <p:nvSpPr>
-          <p:cNvPr id="12" name="Shape 8"/>
+          <p:cNvPr id="11" name="Shape 7"/>
           <p:cNvSpPr/>
           <p:nvPr/>
         </p:nvSpPr>
@@ -4728,7 +4791,7 @@
       </p:sp>
       <p:pic>
         <p:nvPicPr>
-          <p:cNvPr id="13" name="Image 1" descr="preencoded.png">    </p:cNvPr>
+          <p:cNvPr id="12" name="Image 1" descr="preencoded.png">    </p:cNvPr>
           <p:cNvPicPr>
             <a:picLocks noChangeAspect="1"/>
           </p:cNvPicPr>
@@ -4752,7 +4815,7 @@
       </p:pic>
       <p:sp>
         <p:nvSpPr>
-          <p:cNvPr id="14" name="Shape 9"/>
+          <p:cNvPr id="13" name="Shape 8"/>
           <p:cNvSpPr/>
           <p:nvPr/>
         </p:nvSpPr>
@@ -4776,7 +4839,7 @@
       </p:sp>
       <p:sp>
         <p:nvSpPr>
-          <p:cNvPr id="15" name="Shape 10"/>
+          <p:cNvPr id="14" name="Shape 9"/>
           <p:cNvSpPr/>
           <p:nvPr/>
         </p:nvSpPr>
@@ -4801,7 +4864,7 @@
       </p:sp>
       <p:pic>
         <p:nvPicPr>
-          <p:cNvPr id="16" name="Image 2" descr="preencoded.png">    </p:cNvPr>
+          <p:cNvPr id="15" name="Image 2" descr="preencoded.png">    </p:cNvPr>
           <p:cNvPicPr>
             <a:picLocks noChangeAspect="1"/>
           </p:cNvPicPr>
@@ -4825,7 +4888,7 @@
       </p:pic>
       <p:sp>
         <p:nvSpPr>
-          <p:cNvPr id="17" name="Shape 11"/>
+          <p:cNvPr id="16" name="Shape 10"/>
           <p:cNvSpPr/>
           <p:nvPr/>
         </p:nvSpPr>
@@ -4849,7 +4912,7 @@
       </p:sp>
       <p:sp>
         <p:nvSpPr>
-          <p:cNvPr id="18" name="Shape 12"/>
+          <p:cNvPr id="17" name="Shape 11"/>
           <p:cNvSpPr/>
           <p:nvPr/>
         </p:nvSpPr>
@@ -4874,7 +4937,7 @@
       </p:sp>
       <p:pic>
         <p:nvPicPr>
-          <p:cNvPr id="19" name="Image 3" descr="preencoded.png">    </p:cNvPr>
+          <p:cNvPr id="18" name="Image 3" descr="preencoded.png">    </p:cNvPr>
           <p:cNvPicPr>
             <a:picLocks noChangeAspect="1"/>
           </p:cNvPicPr>
@@ -4898,7 +4961,7 @@
       </p:pic>
       <p:sp>
         <p:nvSpPr>
-          <p:cNvPr id="20" name="Shape 13"/>
+          <p:cNvPr id="19" name="Shape 12"/>
           <p:cNvSpPr/>
           <p:nvPr/>
         </p:nvSpPr>
@@ -4922,7 +4985,7 @@
       </p:sp>
       <p:sp>
         <p:nvSpPr>
-          <p:cNvPr id="21" name="Shape 14"/>
+          <p:cNvPr id="20" name="Shape 13"/>
           <p:cNvSpPr/>
           <p:nvPr/>
         </p:nvSpPr>
@@ -4947,7 +5010,7 @@
       </p:sp>
       <p:pic>
         <p:nvPicPr>
-          <p:cNvPr id="22" name="Image 4" descr="preencoded.png">    </p:cNvPr>
+          <p:cNvPr id="21" name="Image 4" descr="preencoded.png">    </p:cNvPr>
           <p:cNvPicPr>
             <a:picLocks noChangeAspect="1"/>
           </p:cNvPicPr>
@@ -4971,7 +5034,7 @@
       </p:pic>
       <p:sp>
         <p:nvSpPr>
-          <p:cNvPr id="23" name="Shape 15"/>
+          <p:cNvPr id="22" name="Shape 14"/>
           <p:cNvSpPr/>
           <p:nvPr/>
         </p:nvSpPr>
@@ -4995,7 +5058,7 @@
       </p:sp>
       <p:sp>
         <p:nvSpPr>
-          <p:cNvPr id="24" name="Shape 16"/>
+          <p:cNvPr id="23" name="Shape 15"/>
           <p:cNvSpPr/>
           <p:nvPr/>
         </p:nvSpPr>
@@ -5020,7 +5083,7 @@
       </p:sp>
       <p:pic>
         <p:nvPicPr>
-          <p:cNvPr id="25" name="Image 5" descr="preencoded.png">    </p:cNvPr>
+          <p:cNvPr id="24" name="Image 5" descr="preencoded.png">    </p:cNvPr>
           <p:cNvPicPr>
             <a:picLocks noChangeAspect="1"/>
           </p:cNvPicPr>
@@ -5044,7 +5107,7 @@
       </p:pic>
       <p:sp>
         <p:nvSpPr>
-          <p:cNvPr id="26" name="Text 17"/>
+          <p:cNvPr id="25" name="Text 16"/>
           <p:cNvSpPr txBox="1"/>
           <p:nvPr/>
         </p:nvSpPr>
@@ -5083,7 +5146,7 @@
       </p:sp>
       <p:sp>
         <p:nvSpPr>
-          <p:cNvPr id="27" name="Text 18"/>
+          <p:cNvPr id="26" name="Text 17"/>
           <p:cNvSpPr txBox="1"/>
           <p:nvPr/>
         </p:nvSpPr>
@@ -5122,7 +5185,7 @@
       </p:sp>
       <p:sp>
         <p:nvSpPr>
-          <p:cNvPr id="28" name="Text 19"/>
+          <p:cNvPr id="27" name="Text 18"/>
           <p:cNvSpPr txBox="1"/>
           <p:nvPr/>
         </p:nvSpPr>
@@ -12911,7 +12974,97 @@
       </p:sp>
       <p:sp>
         <p:nvSpPr>
-          <p:cNvPr id="11" name="Text 8"/>
+          <p:cNvPr id="11" name="Shape 8"/>
+          <p:cNvSpPr/>
+          <p:nvPr/>
+        </p:nvSpPr>
+        <p:spPr>
+          <a:xfrm>
+            <a:off x="6949440" y="2697480"/>
+            <a:ext cx="1737360" cy="1965960"/>
+          </a:xfrm>
+          <a:prstGeom prst="roundRect">
+            <a:avLst>
+              <a:gd name="adj" fmla="val 4211"/>
+            </a:avLst>
+          </a:prstGeom>
+          <a:solidFill>
+            <a:srgbClr val="FFFFFF"/>
+          </a:solidFill>
+          <a:ln w="12700">
+            <a:solidFill>
+              <a:srgbClr val="FFFFFF"/>
+            </a:solidFill>
+            <a:prstDash val="solid"/>
+          </a:ln>
+        </p:spPr>
+      </p:sp>
+      <p:pic>
+        <p:nvPicPr>
+          <p:cNvPr id="12" name="Image 1" descr="QR code for CIA Triage">    </p:cNvPr>
+          <p:cNvPicPr>
+            <a:picLocks noChangeAspect="1"/>
+          </p:cNvPicPr>
+          <p:nvPr/>
+        </p:nvPicPr>
+        <p:blipFill>
+          <a:blip r:embed="rId2"/>
+          <a:stretch>
+            <a:fillRect/>
+          </a:stretch>
+        </p:blipFill>
+        <p:spPr>
+          <a:xfrm>
+            <a:off x="7059168" y="2770632"/>
+            <a:ext cx="1517904" cy="1517904"/>
+          </a:xfrm>
+          <a:prstGeom prst="rect">
+            <a:avLst/>
+          </a:prstGeom>
+        </p:spPr>
+      </p:pic>
+      <p:sp>
+        <p:nvSpPr>
+          <p:cNvPr id="13" name="Text 9"/>
+          <p:cNvSpPr txBox="1"/>
+          <p:nvPr/>
+        </p:nvSpPr>
+        <p:spPr>
+          <a:xfrm>
+            <a:off x="6949440" y="4315968"/>
+            <a:ext cx="1737360" cy="256032"/>
+          </a:xfrm>
+          <a:prstGeom prst="rect">
+            <a:avLst/>
+          </a:prstGeom>
+          <a:noFill/>
+          <a:ln/>
+        </p:spPr>
+        <p:txBody>
+          <a:bodyPr wrap="square" lIns="0" tIns="0" rIns="0" bIns="0" rtlCol="0" anchor="ctr"/>
+          <a:lstStyle/>
+          <a:p>
+            <a:pPr algn="ctr" indent="0" marL="0">
+              <a:buNone/>
+            </a:pPr>
+            <a:r>
+              <a:rPr lang="en-US" sz="1100" b="1" dirty="0">
+                <a:solidFill>
+                  <a:srgbClr val="262A20"/>
+                </a:solidFill>
+                <a:latin typeface="Open Sans" pitchFamily="34" charset="0"/>
+                <a:ea typeface="Open Sans" pitchFamily="34" charset="-122"/>
+                <a:cs typeface="Open Sans" pitchFamily="34" charset="-120"/>
+              </a:rPr>
+              <a:t>Scan to play</a:t>
+            </a:r>
+            <a:endParaRPr lang="en-US" sz="1100" dirty="0"/>
+          </a:p>
+        </p:txBody>
+      </p:sp>
+      <p:sp>
+        <p:nvSpPr>
+          <p:cNvPr id="14" name="Text 10"/>
           <p:cNvSpPr txBox="1"/>
           <p:nvPr/>
         </p:nvSpPr>
@@ -12950,7 +13103,7 @@
       </p:sp>
       <p:sp>
         <p:nvSpPr>
-          <p:cNvPr id="12" name="Text 9"/>
+          <p:cNvPr id="15" name="Text 11"/>
           <p:cNvSpPr txBox="1"/>
           <p:nvPr/>
         </p:nvSpPr>
@@ -13380,7 +13533,97 @@
       </p:sp>
       <p:sp>
         <p:nvSpPr>
-          <p:cNvPr id="11" name="Text 8"/>
+          <p:cNvPr id="11" name="Shape 8"/>
+          <p:cNvSpPr/>
+          <p:nvPr/>
+        </p:nvSpPr>
+        <p:spPr>
+          <a:xfrm>
+            <a:off x="6949440" y="2697480"/>
+            <a:ext cx="1737360" cy="1965960"/>
+          </a:xfrm>
+          <a:prstGeom prst="roundRect">
+            <a:avLst>
+              <a:gd name="adj" fmla="val 4211"/>
+            </a:avLst>
+          </a:prstGeom>
+          <a:solidFill>
+            <a:srgbClr val="FFFFFF"/>
+          </a:solidFill>
+          <a:ln w="12700">
+            <a:solidFill>
+              <a:srgbClr val="FFFFFF"/>
+            </a:solidFill>
+            <a:prstDash val="solid"/>
+          </a:ln>
+        </p:spPr>
+      </p:sp>
+      <p:pic>
+        <p:nvPicPr>
+          <p:cNvPr id="12" name="Image 1" descr="QR code for What Is TeaLeaf Worth?">    </p:cNvPr>
+          <p:cNvPicPr>
+            <a:picLocks noChangeAspect="1"/>
+          </p:cNvPicPr>
+          <p:nvPr/>
+        </p:nvPicPr>
+        <p:blipFill>
+          <a:blip r:embed="rId2"/>
+          <a:stretch>
+            <a:fillRect/>
+          </a:stretch>
+        </p:blipFill>
+        <p:spPr>
+          <a:xfrm>
+            <a:off x="7059168" y="2770632"/>
+            <a:ext cx="1517904" cy="1517904"/>
+          </a:xfrm>
+          <a:prstGeom prst="rect">
+            <a:avLst/>
+          </a:prstGeom>
+        </p:spPr>
+      </p:pic>
+      <p:sp>
+        <p:nvSpPr>
+          <p:cNvPr id="13" name="Text 9"/>
+          <p:cNvSpPr txBox="1"/>
+          <p:nvPr/>
+        </p:nvSpPr>
+        <p:spPr>
+          <a:xfrm>
+            <a:off x="6949440" y="4315968"/>
+            <a:ext cx="1737360" cy="256032"/>
+          </a:xfrm>
+          <a:prstGeom prst="rect">
+            <a:avLst/>
+          </a:prstGeom>
+          <a:noFill/>
+          <a:ln/>
+        </p:spPr>
+        <p:txBody>
+          <a:bodyPr wrap="square" lIns="0" tIns="0" rIns="0" bIns="0" rtlCol="0" anchor="ctr"/>
+          <a:lstStyle/>
+          <a:p>
+            <a:pPr algn="ctr" indent="0" marL="0">
+              <a:buNone/>
+            </a:pPr>
+            <a:r>
+              <a:rPr lang="en-US" sz="1100" b="1" dirty="0">
+                <a:solidFill>
+                  <a:srgbClr val="262A20"/>
+                </a:solidFill>
+                <a:latin typeface="Open Sans" pitchFamily="34" charset="0"/>
+                <a:ea typeface="Open Sans" pitchFamily="34" charset="-122"/>
+                <a:cs typeface="Open Sans" pitchFamily="34" charset="-120"/>
+              </a:rPr>
+              <a:t>Scan to play</a:t>
+            </a:r>
+            <a:endParaRPr lang="en-US" sz="1100" dirty="0"/>
+          </a:p>
+        </p:txBody>
+      </p:sp>
+      <p:sp>
+        <p:nvSpPr>
+          <p:cNvPr id="14" name="Text 10"/>
           <p:cNvSpPr txBox="1"/>
           <p:nvPr/>
         </p:nvSpPr>
@@ -13419,7 +13662,7 @@
       </p:sp>
       <p:sp>
         <p:nvSpPr>
-          <p:cNvPr id="12" name="Text 9"/>
+          <p:cNvPr id="15" name="Text 11"/>
           <p:cNvSpPr txBox="1"/>
           <p:nvPr/>
         </p:nvSpPr>
@@ -19023,7 +19266,97 @@
       </p:sp>
       <p:sp>
         <p:nvSpPr>
-          <p:cNvPr id="11" name="Text 8"/>
+          <p:cNvPr id="11" name="Shape 8"/>
+          <p:cNvSpPr/>
+          <p:nvPr/>
+        </p:nvSpPr>
+        <p:spPr>
+          <a:xfrm>
+            <a:off x="6949440" y="2697480"/>
+            <a:ext cx="1737360" cy="1965960"/>
+          </a:xfrm>
+          <a:prstGeom prst="roundRect">
+            <a:avLst>
+              <a:gd name="adj" fmla="val 4211"/>
+            </a:avLst>
+          </a:prstGeom>
+          <a:solidFill>
+            <a:srgbClr val="FFFFFF"/>
+          </a:solidFill>
+          <a:ln w="12700">
+            <a:solidFill>
+              <a:srgbClr val="FFFFFF"/>
+            </a:solidFill>
+            <a:prstDash val="solid"/>
+          </a:ln>
+        </p:spPr>
+      </p:sp>
+      <p:pic>
+        <p:nvPicPr>
+          <p:cNvPr id="12" name="Image 1" descr="QR code for Risk Word Sorter">    </p:cNvPr>
+          <p:cNvPicPr>
+            <a:picLocks noChangeAspect="1"/>
+          </p:cNvPicPr>
+          <p:nvPr/>
+        </p:nvPicPr>
+        <p:blipFill>
+          <a:blip r:embed="rId2"/>
+          <a:stretch>
+            <a:fillRect/>
+          </a:stretch>
+        </p:blipFill>
+        <p:spPr>
+          <a:xfrm>
+            <a:off x="7059168" y="2770632"/>
+            <a:ext cx="1517904" cy="1517904"/>
+          </a:xfrm>
+          <a:prstGeom prst="rect">
+            <a:avLst/>
+          </a:prstGeom>
+        </p:spPr>
+      </p:pic>
+      <p:sp>
+        <p:nvSpPr>
+          <p:cNvPr id="13" name="Text 9"/>
+          <p:cNvSpPr txBox="1"/>
+          <p:nvPr/>
+        </p:nvSpPr>
+        <p:spPr>
+          <a:xfrm>
+            <a:off x="6949440" y="4315968"/>
+            <a:ext cx="1737360" cy="256032"/>
+          </a:xfrm>
+          <a:prstGeom prst="rect">
+            <a:avLst/>
+          </a:prstGeom>
+          <a:noFill/>
+          <a:ln/>
+        </p:spPr>
+        <p:txBody>
+          <a:bodyPr wrap="square" lIns="0" tIns="0" rIns="0" bIns="0" rtlCol="0" anchor="ctr"/>
+          <a:lstStyle/>
+          <a:p>
+            <a:pPr algn="ctr" indent="0" marL="0">
+              <a:buNone/>
+            </a:pPr>
+            <a:r>
+              <a:rPr lang="en-US" sz="1100" b="1" dirty="0">
+                <a:solidFill>
+                  <a:srgbClr val="262A20"/>
+                </a:solidFill>
+                <a:latin typeface="Open Sans" pitchFamily="34" charset="0"/>
+                <a:ea typeface="Open Sans" pitchFamily="34" charset="-122"/>
+                <a:cs typeface="Open Sans" pitchFamily="34" charset="-120"/>
+              </a:rPr>
+              <a:t>Scan to play</a:t>
+            </a:r>
+            <a:endParaRPr lang="en-US" sz="1100" dirty="0"/>
+          </a:p>
+        </p:txBody>
+      </p:sp>
+      <p:sp>
+        <p:nvSpPr>
+          <p:cNvPr id="14" name="Text 10"/>
           <p:cNvSpPr txBox="1"/>
           <p:nvPr/>
         </p:nvSpPr>
@@ -19062,7 +19395,7 @@
       </p:sp>
       <p:sp>
         <p:nvSpPr>
-          <p:cNvPr id="12" name="Text 9"/>
+          <p:cNvPr id="15" name="Text 11"/>
           <p:cNvSpPr txBox="1"/>
           <p:nvPr/>
         </p:nvSpPr>
@@ -19492,7 +19825,97 @@
       </p:sp>
       <p:sp>
         <p:nvSpPr>
-          <p:cNvPr id="11" name="Text 8"/>
+          <p:cNvPr id="11" name="Shape 8"/>
+          <p:cNvSpPr/>
+          <p:nvPr/>
+        </p:nvSpPr>
+        <p:spPr>
+          <a:xfrm>
+            <a:off x="6949440" y="2697480"/>
+            <a:ext cx="1737360" cy="1965960"/>
+          </a:xfrm>
+          <a:prstGeom prst="roundRect">
+            <a:avLst>
+              <a:gd name="adj" fmla="val 4211"/>
+            </a:avLst>
+          </a:prstGeom>
+          <a:solidFill>
+            <a:srgbClr val="FFFFFF"/>
+          </a:solidFill>
+          <a:ln w="12700">
+            <a:solidFill>
+              <a:srgbClr val="FFFFFF"/>
+            </a:solidFill>
+            <a:prstDash val="solid"/>
+          </a:ln>
+        </p:spPr>
+      </p:sp>
+      <p:pic>
+        <p:nvPicPr>
+          <p:cNvPr id="12" name="Image 1" descr="QR code for Risk Builder">    </p:cNvPr>
+          <p:cNvPicPr>
+            <a:picLocks noChangeAspect="1"/>
+          </p:cNvPicPr>
+          <p:nvPr/>
+        </p:nvPicPr>
+        <p:blipFill>
+          <a:blip r:embed="rId2"/>
+          <a:stretch>
+            <a:fillRect/>
+          </a:stretch>
+        </p:blipFill>
+        <p:spPr>
+          <a:xfrm>
+            <a:off x="7059168" y="2770632"/>
+            <a:ext cx="1517904" cy="1517904"/>
+          </a:xfrm>
+          <a:prstGeom prst="rect">
+            <a:avLst/>
+          </a:prstGeom>
+        </p:spPr>
+      </p:pic>
+      <p:sp>
+        <p:nvSpPr>
+          <p:cNvPr id="13" name="Text 9"/>
+          <p:cNvSpPr txBox="1"/>
+          <p:nvPr/>
+        </p:nvSpPr>
+        <p:spPr>
+          <a:xfrm>
+            <a:off x="6949440" y="4315968"/>
+            <a:ext cx="1737360" cy="256032"/>
+          </a:xfrm>
+          <a:prstGeom prst="rect">
+            <a:avLst/>
+          </a:prstGeom>
+          <a:noFill/>
+          <a:ln/>
+        </p:spPr>
+        <p:txBody>
+          <a:bodyPr wrap="square" lIns="0" tIns="0" rIns="0" bIns="0" rtlCol="0" anchor="ctr"/>
+          <a:lstStyle/>
+          <a:p>
+            <a:pPr algn="ctr" indent="0" marL="0">
+              <a:buNone/>
+            </a:pPr>
+            <a:r>
+              <a:rPr lang="en-US" sz="1100" b="1" dirty="0">
+                <a:solidFill>
+                  <a:srgbClr val="262A20"/>
+                </a:solidFill>
+                <a:latin typeface="Open Sans" pitchFamily="34" charset="0"/>
+                <a:ea typeface="Open Sans" pitchFamily="34" charset="-122"/>
+                <a:cs typeface="Open Sans" pitchFamily="34" charset="-120"/>
+              </a:rPr>
+              <a:t>Scan to play</a:t>
+            </a:r>
+            <a:endParaRPr lang="en-US" sz="1100" dirty="0"/>
+          </a:p>
+        </p:txBody>
+      </p:sp>
+      <p:sp>
+        <p:nvSpPr>
+          <p:cNvPr id="14" name="Text 10"/>
           <p:cNvSpPr txBox="1"/>
           <p:nvPr/>
         </p:nvSpPr>
@@ -19531,7 +19954,7 @@
       </p:sp>
       <p:sp>
         <p:nvSpPr>
-          <p:cNvPr id="12" name="Text 9"/>
+          <p:cNvPr id="15" name="Text 11"/>
           <p:cNvSpPr txBox="1"/>
           <p:nvPr/>
         </p:nvSpPr>
@@ -22001,7 +22424,97 @@
       </p:sp>
       <p:sp>
         <p:nvSpPr>
-          <p:cNvPr id="11" name="Text 8"/>
+          <p:cNvPr id="11" name="Shape 8"/>
+          <p:cNvSpPr/>
+          <p:nvPr/>
+        </p:nvSpPr>
+        <p:spPr>
+          <a:xfrm>
+            <a:off x="6949440" y="2697480"/>
+            <a:ext cx="1737360" cy="1965960"/>
+          </a:xfrm>
+          <a:prstGeom prst="roundRect">
+            <a:avLst>
+              <a:gd name="adj" fmla="val 4211"/>
+            </a:avLst>
+          </a:prstGeom>
+          <a:solidFill>
+            <a:srgbClr val="FFFFFF"/>
+          </a:solidFill>
+          <a:ln w="12700">
+            <a:solidFill>
+              <a:srgbClr val="FFFFFF"/>
+            </a:solidFill>
+            <a:prstDash val="solid"/>
+          </a:ln>
+        </p:spPr>
+      </p:sp>
+      <p:pic>
+        <p:nvPicPr>
+          <p:cNvPr id="12" name="Image 1" descr="QR code for Risk Words Ladder">    </p:cNvPr>
+          <p:cNvPicPr>
+            <a:picLocks noChangeAspect="1"/>
+          </p:cNvPicPr>
+          <p:nvPr/>
+        </p:nvPicPr>
+        <p:blipFill>
+          <a:blip r:embed="rId2"/>
+          <a:stretch>
+            <a:fillRect/>
+          </a:stretch>
+        </p:blipFill>
+        <p:spPr>
+          <a:xfrm>
+            <a:off x="7059168" y="2770632"/>
+            <a:ext cx="1517904" cy="1517904"/>
+          </a:xfrm>
+          <a:prstGeom prst="rect">
+            <a:avLst/>
+          </a:prstGeom>
+        </p:spPr>
+      </p:pic>
+      <p:sp>
+        <p:nvSpPr>
+          <p:cNvPr id="13" name="Text 9"/>
+          <p:cNvSpPr txBox="1"/>
+          <p:nvPr/>
+        </p:nvSpPr>
+        <p:spPr>
+          <a:xfrm>
+            <a:off x="6949440" y="4315968"/>
+            <a:ext cx="1737360" cy="256032"/>
+          </a:xfrm>
+          <a:prstGeom prst="rect">
+            <a:avLst/>
+          </a:prstGeom>
+          <a:noFill/>
+          <a:ln/>
+        </p:spPr>
+        <p:txBody>
+          <a:bodyPr wrap="square" lIns="0" tIns="0" rIns="0" bIns="0" rtlCol="0" anchor="ctr"/>
+          <a:lstStyle/>
+          <a:p>
+            <a:pPr algn="ctr" indent="0" marL="0">
+              <a:buNone/>
+            </a:pPr>
+            <a:r>
+              <a:rPr lang="en-US" sz="1100" b="1" dirty="0">
+                <a:solidFill>
+                  <a:srgbClr val="262A20"/>
+                </a:solidFill>
+                <a:latin typeface="Open Sans" pitchFamily="34" charset="0"/>
+                <a:ea typeface="Open Sans" pitchFamily="34" charset="-122"/>
+                <a:cs typeface="Open Sans" pitchFamily="34" charset="-120"/>
+              </a:rPr>
+              <a:t>Scan to play</a:t>
+            </a:r>
+            <a:endParaRPr lang="en-US" sz="1100" dirty="0"/>
+          </a:p>
+        </p:txBody>
+      </p:sp>
+      <p:sp>
+        <p:nvSpPr>
+          <p:cNvPr id="14" name="Text 10"/>
           <p:cNvSpPr txBox="1"/>
           <p:nvPr/>
         </p:nvSpPr>
@@ -22040,7 +22553,7 @@
       </p:sp>
       <p:sp>
         <p:nvSpPr>
-          <p:cNvPr id="12" name="Text 9"/>
+          <p:cNvPr id="15" name="Text 11"/>
           <p:cNvSpPr txBox="1"/>
           <p:nvPr/>
         </p:nvSpPr>
@@ -23861,7 +24374,7 @@
         <p:spPr>
           <a:xfrm>
             <a:off x="1188720" y="1188720"/>
-            <a:ext cx="7498080" cy="310896"/>
+            <a:ext cx="4663440" cy="310896"/>
           </a:xfrm>
           <a:prstGeom prst="rect">
             <a:avLst/>
@@ -23900,7 +24413,7 @@
         <p:spPr>
           <a:xfrm>
             <a:off x="1188720" y="1499616"/>
-            <a:ext cx="7498080" cy="475488"/>
+            <a:ext cx="4663440" cy="475488"/>
           </a:xfrm>
           <a:prstGeom prst="rect">
             <a:avLst/>
@@ -23988,7 +24501,7 @@
         <p:spPr>
           <a:xfrm>
             <a:off x="1188720" y="2029968"/>
-            <a:ext cx="7498080" cy="310896"/>
+            <a:ext cx="4663440" cy="310896"/>
           </a:xfrm>
           <a:prstGeom prst="rect">
             <a:avLst/>
@@ -24027,7 +24540,7 @@
         <p:spPr>
           <a:xfrm>
             <a:off x="1188720" y="2340864"/>
-            <a:ext cx="7498080" cy="475488"/>
+            <a:ext cx="4663440" cy="475488"/>
           </a:xfrm>
           <a:prstGeom prst="rect">
             <a:avLst/>
@@ -24115,7 +24628,7 @@
         <p:spPr>
           <a:xfrm>
             <a:off x="1188720" y="2871216"/>
-            <a:ext cx="7498080" cy="310896"/>
+            <a:ext cx="4663440" cy="310896"/>
           </a:xfrm>
           <a:prstGeom prst="rect">
             <a:avLst/>
@@ -24154,7 +24667,7 @@
         <p:spPr>
           <a:xfrm>
             <a:off x="1188720" y="3182112"/>
-            <a:ext cx="7498080" cy="475488"/>
+            <a:ext cx="4663440" cy="475488"/>
           </a:xfrm>
           <a:prstGeom prst="rect">
             <a:avLst/>
@@ -24242,7 +24755,7 @@
         <p:spPr>
           <a:xfrm>
             <a:off x="1188720" y="3712464"/>
-            <a:ext cx="7498080" cy="310896"/>
+            <a:ext cx="4663440" cy="310896"/>
           </a:xfrm>
           <a:prstGeom prst="rect">
             <a:avLst/>
@@ -24281,7 +24794,7 @@
         <p:spPr>
           <a:xfrm>
             <a:off x="1188720" y="4023360"/>
-            <a:ext cx="7498080" cy="475488"/>
+            <a:ext cx="4663440" cy="475488"/>
           </a:xfrm>
           <a:prstGeom prst="rect">
             <a:avLst/>
@@ -24311,6 +24824,30 @@
           </a:p>
         </p:txBody>
       </p:sp>
+      <p:pic>
+        <p:nvPicPr>
+          <p:cNvPr id="24" name="Image 4" descr="it_server">    </p:cNvPr>
+          <p:cNvPicPr>
+            <a:picLocks noChangeAspect="1"/>
+          </p:cNvPicPr>
+          <p:nvPr/>
+        </p:nvPicPr>
+        <p:blipFill>
+          <a:blip r:embed="rId5"/>
+          <a:stretch>
+            <a:fillRect/>
+          </a:stretch>
+        </p:blipFill>
+        <p:spPr>
+          <a:xfrm>
+            <a:off x="5989320" y="1750658"/>
+            <a:ext cx="2743200" cy="2259404"/>
+          </a:xfrm>
+          <a:prstGeom prst="rect">
+            <a:avLst/>
+          </a:prstGeom>
+        </p:spPr>
+      </p:pic>
     </p:spTree>
   </p:cSld>
   <p:clrMapOvr>
@@ -24391,7 +24928,7 @@
         <p:spPr>
           <a:xfrm>
             <a:off x="1097280" y="1188720"/>
-            <a:ext cx="7132320" cy="2011680"/>
+            <a:ext cx="4572000" cy="2011680"/>
           </a:xfrm>
           <a:prstGeom prst="rect">
             <a:avLst/>
@@ -24407,7 +24944,7 @@
               <a:buNone/>
             </a:pPr>
             <a:r>
-              <a:rPr lang="en-US" sz="2800" b="1" dirty="0">
+              <a:rPr lang="en-US" sz="2400" b="1" dirty="0">
                 <a:solidFill>
                   <a:srgbClr val="FFFFFF"/>
                 </a:solidFill>
@@ -24417,7 +24954,7 @@
               </a:rPr>
               <a:t>What do we have that is worth protecting, and who would want it?</a:t>
             </a:r>
-            <a:endParaRPr lang="en-US" sz="2800" dirty="0"/>
+            <a:endParaRPr lang="en-US" sz="2400" dirty="0"/>
           </a:p>
         </p:txBody>
       </p:sp>
@@ -24430,16 +24967,16 @@
         <p:spPr>
           <a:xfrm>
             <a:off x="1097280" y="3383280"/>
-            <a:ext cx="7132320" cy="457200"/>
-          </a:xfrm>
-          <a:prstGeom prst="rect">
-            <a:avLst/>
-          </a:prstGeom>
-          <a:noFill/>
-          <a:ln/>
-        </p:spPr>
-        <p:txBody>
-          <a:bodyPr wrap="square" lIns="0" tIns="0" rIns="0" bIns="0" rtlCol="0" anchor="ctr"/>
+            <a:ext cx="4572000" cy="548640"/>
+          </a:xfrm>
+          <a:prstGeom prst="rect">
+            <a:avLst/>
+          </a:prstGeom>
+          <a:noFill/>
+          <a:ln/>
+        </p:spPr>
+        <p:txBody>
+          <a:bodyPr wrap="square" lIns="0" tIns="0" rIns="0" bIns="0" rtlCol="0" anchor="t"/>
           <a:lstStyle/>
           <a:p>
             <a:pPr indent="0" marL="0">
@@ -24462,7 +24999,56 @@
       </p:sp>
       <p:sp>
         <p:nvSpPr>
-          <p:cNvPr id="5" name="Text 3"/>
+          <p:cNvPr id="5" name="Shape 3"/>
+          <p:cNvSpPr/>
+          <p:nvPr/>
+        </p:nvSpPr>
+        <p:spPr>
+          <a:xfrm>
+            <a:off x="5806440" y="548640"/>
+            <a:ext cx="3017520" cy="3840480"/>
+          </a:xfrm>
+          <a:prstGeom prst="ellipse">
+            <a:avLst/>
+          </a:prstGeom>
+          <a:solidFill>
+            <a:srgbClr val="3A3F33"/>
+          </a:solidFill>
+          <a:ln w="12700">
+            <a:solidFill>
+              <a:srgbClr val="3A3F33"/>
+            </a:solidFill>
+            <a:prstDash val="solid"/>
+          </a:ln>
+        </p:spPr>
+      </p:sp>
+      <p:pic>
+        <p:nvPicPr>
+          <p:cNvPr id="6" name="Image 0" descr="md">    </p:cNvPr>
+          <p:cNvPicPr>
+            <a:picLocks noChangeAspect="1"/>
+          </p:cNvPicPr>
+          <p:nvPr/>
+        </p:nvPicPr>
+        <p:blipFill>
+          <a:blip r:embed="rId1"/>
+          <a:stretch>
+            <a:fillRect/>
+          </a:stretch>
+        </p:blipFill>
+        <p:spPr>
+          <a:xfrm>
+            <a:off x="5760720" y="742717"/>
+            <a:ext cx="3108960" cy="3452327"/>
+          </a:xfrm>
+          <a:prstGeom prst="rect">
+            <a:avLst/>
+          </a:prstGeom>
+        </p:spPr>
+      </p:pic>
+      <p:sp>
+        <p:nvSpPr>
+          <p:cNvPr id="7" name="Text 4"/>
           <p:cNvSpPr txBox="1"/>
           <p:nvPr/>
         </p:nvSpPr>
@@ -24501,7 +25087,7 @@
       </p:sp>
       <p:sp>
         <p:nvSpPr>
-          <p:cNvPr id="6" name="Text 4"/>
+          <p:cNvPr id="8" name="Text 5"/>
           <p:cNvSpPr txBox="1"/>
           <p:nvPr/>
         </p:nvSpPr>

--- a/slides/11-01-why-security-matters.pptx
+++ b/slides/11-01-why-security-matters.pptx
@@ -4369,17 +4369,17 @@
         </p:nvSpPr>
         <p:spPr>
           <a:xfrm>
-            <a:off x="457200" y="4526280"/>
-            <a:ext cx="8229600" cy="201168"/>
-          </a:xfrm>
-          <a:prstGeom prst="rect">
-            <a:avLst/>
-          </a:prstGeom>
-          <a:noFill/>
-          <a:ln/>
-        </p:spPr>
-        <p:txBody>
-          <a:bodyPr wrap="square" lIns="0" tIns="0" rIns="0" bIns="0" rtlCol="0" anchor="ctr"/>
+            <a:off x="457200" y="4407408"/>
+            <a:ext cx="8229600" cy="329184"/>
+          </a:xfrm>
+          <a:prstGeom prst="rect">
+            <a:avLst/>
+          </a:prstGeom>
+          <a:noFill/>
+          <a:ln/>
+        </p:spPr>
+        <p:txBody>
+          <a:bodyPr wrap="square" lIns="0" tIns="0" rIns="0" bIns="0" rtlCol="0" anchor="t"/>
           <a:lstStyle/>
           <a:p>
             <a:pPr indent="0" marL="0">
@@ -4394,7 +4394,24 @@
                 <a:ea typeface="Open Sans" pitchFamily="34" charset="-122"/>
                 <a:cs typeface="Open Sans" pitchFamily="34" charset="-120"/>
               </a:rPr>
-              <a:t>© 2026 Niranga Dharmaratna. Licensed CC BY-NC-SA 4.0. Icons: Font Awesome Free (CC BY 4.0). Illustrations: original, same licence.</a:t>
+              <a:t>© 2026 Niranga Dharmaratna, School of Computing &amp; Engineering, National Institute of Business Management</a:t>
+            </a:r>
+            <a:endParaRPr lang="en-US" sz="750" dirty="0"/>
+          </a:p>
+          <a:p>
+            <a:pPr indent="0" marL="0">
+              <a:buNone/>
+            </a:pPr>
+            <a:r>
+              <a:rPr lang="en-US" sz="750" dirty="0">
+                <a:solidFill>
+                  <a:srgbClr val="A39E98"/>
+                </a:solidFill>
+                <a:latin typeface="Open Sans" pitchFamily="34" charset="0"/>
+                <a:ea typeface="Open Sans" pitchFamily="34" charset="-122"/>
+                <a:cs typeface="Open Sans" pitchFamily="34" charset="-120"/>
+              </a:rPr>
+              <a:t>Licensed CC BY-NC-SA 4.0. Icons: Font Awesome Free (CC BY 4.0). Illustrations: original, same licence.</a:t>
             </a:r>
             <a:endParaRPr lang="en-US" sz="750" dirty="0"/>
           </a:p>

--- a/slides/11-01-why-security-matters.pptx
+++ b/slides/11-01-why-security-matters.pptx
@@ -4161,7 +4161,7 @@
                 <a:ea typeface="Open Sans" pitchFamily="34" charset="-122"/>
                 <a:cs typeface="Open Sans" pitchFamily="34" charset="-120"/>
               </a:rPr>
-              <a:t>DBIS-11  |  Day 1  |  Session 11.1  |  9:00 to 12:00</a:t>
+              <a:t>DBIS-11  |  Day 1  |  Session 11.1</a:t>
             </a:r>
             <a:endParaRPr lang="en-US" sz="1400" dirty="0"/>
           </a:p>
@@ -4369,6 +4369,45 @@
         </p:nvSpPr>
         <p:spPr>
           <a:xfrm>
+            <a:off x="457200" y="4023360"/>
+            <a:ext cx="4937760" cy="274320"/>
+          </a:xfrm>
+          <a:prstGeom prst="rect">
+            <a:avLst/>
+          </a:prstGeom>
+          <a:noFill/>
+          <a:ln/>
+        </p:spPr>
+        <p:txBody>
+          <a:bodyPr wrap="square" lIns="0" tIns="0" rIns="0" bIns="0" rtlCol="0" anchor="ctr"/>
+          <a:lstStyle/>
+          <a:p>
+            <a:pPr indent="0" marL="0">
+              <a:buNone/>
+            </a:pPr>
+            <a:r>
+              <a:rPr lang="en-US" sz="1200" b="1" dirty="0">
+                <a:solidFill>
+                  <a:srgbClr val="C7A887"/>
+                </a:solidFill>
+                <a:latin typeface="Open Sans" pitchFamily="34" charset="0"/>
+                <a:ea typeface="Open Sans" pitchFamily="34" charset="-122"/>
+                <a:cs typeface="Open Sans" pitchFamily="34" charset="-120"/>
+              </a:rPr>
+              <a:t>Niranga Dharmaratna - niranga@nibm.lk</a:t>
+            </a:r>
+            <a:endParaRPr lang="en-US" sz="1200" dirty="0"/>
+          </a:p>
+        </p:txBody>
+      </p:sp>
+      <p:sp>
+        <p:nvSpPr>
+          <p:cNvPr id="12" name="Text 8"/>
+          <p:cNvSpPr txBox="1"/>
+          <p:nvPr/>
+        </p:nvSpPr>
+        <p:spPr>
+          <a:xfrm>
             <a:off x="457200" y="4407408"/>
             <a:ext cx="8229600" cy="329184"/>
           </a:xfrm>
@@ -4419,7 +4458,7 @@
       </p:sp>
       <p:sp>
         <p:nvSpPr>
-          <p:cNvPr id="12" name="Text 8"/>
+          <p:cNvPr id="13" name="Text 9"/>
           <p:cNvSpPr txBox="1"/>
           <p:nvPr/>
         </p:nvSpPr>
@@ -4458,7 +4497,7 @@
       </p:sp>
       <p:sp>
         <p:nvSpPr>
-          <p:cNvPr id="13" name="Text 9"/>
+          <p:cNvPr id="14" name="Text 10"/>
           <p:cNvSpPr txBox="1"/>
           <p:nvPr/>
         </p:nvSpPr>
